--- a/cours/Module_Réseau_Mostaganem/Série_Officielle/RSID-M1-S2/Fiche_Reseaux_RSID-M1-S2_00_Fiche-Module_FR.pptx
+++ b/cours/Module_Réseau_Mostaganem/Série_Officielle/RSID-M1-S2/Fiche_Reseaux_RSID-M1-S2_00_Fiche-Module_FR.pptx
@@ -482,6 +482,806 @@
     </a:lvl9pPr>
   </p:notesStyle>
 </p:notesMaster>
+</file>
+
+<file path=ppt/notesSlides/notesSlide1.xml><?xml version="1.0" encoding="utf-8"?>
+<p:notes xmlns:a="http://schemas.openxmlformats.org/drawingml/2006/main" xmlns:p="http://schemas.openxmlformats.org/presentationml/2006/main" xmlns:r="http://schemas.openxmlformats.org/officeDocument/2006/relationships">
+  <p:cSld>
+    <p:spTree>
+      <p:nvGrpSpPr>
+        <p:cNvPr id="1" name=""/>
+        <p:cNvGrpSpPr/>
+        <p:nvPr/>
+      </p:nvGrpSpPr>
+      <p:grpSpPr>
+        <a:xfrm>
+          <a:off x="0" y="0"/>
+          <a:ext cx="0" cy="0"/>
+          <a:chOff x="0" y="0"/>
+          <a:chExt cx="0" cy="0"/>
+        </a:xfrm>
+      </p:grpSpPr>
+      <p:sp>
+        <p:nvSpPr>
+          <p:cNvPr id="2" name="Slide Image Placeholder 1"/>
+          <p:cNvSpPr>
+            <a:spLocks noGrp="1"/>
+          </p:cNvSpPr>
+          <p:nvPr>
+            <p:ph type="sldImg" idx="2"/>
+          </p:nvPr>
+        </p:nvSpPr>
+        <p:spPr/>
+      </p:sp>
+      <p:sp>
+        <p:nvSpPr>
+          <p:cNvPr id="3" name="Notes Placeholder 2"/>
+          <p:cNvSpPr>
+            <a:spLocks noGrp="1"/>
+          </p:cNvSpPr>
+          <p:nvPr>
+            <p:ph type="body" idx="3" sz="quarter"/>
+          </p:nvPr>
+        </p:nvSpPr>
+        <p:spPr/>
+        <p:txBody>
+          <a:bodyPr/>
+          <a:lstStyle/>
+          <a:p>
+            <a:r>
+              <a:t>Fiche Module — Module Réseaux Mostaganem</a:t>
+            </a:r>
+          </a:p>
+          <a:p>
+            <a:r>
+              <a:t>Dr. BELACEL Madani — Université de Mostaganem</a:t>
+            </a:r>
+          </a:p>
+          <a:p>
+            <a:r>
+              <a:t>Année 2026-2027</a:t>
+            </a:r>
+          </a:p>
+        </p:txBody>
+      </p:sp>
+      <p:sp>
+        <p:nvSpPr>
+          <p:cNvPr id="4" name="Slide Number Placeholder 3"/>
+          <p:cNvSpPr>
+            <a:spLocks noGrp="1"/>
+          </p:cNvSpPr>
+          <p:nvPr>
+            <p:ph type="sldNum" idx="5" sz="quarter"/>
+          </p:nvPr>
+        </p:nvSpPr>
+        <p:spPr/>
+      </p:sp>
+    </p:spTree>
+  </p:cSld>
+  <p:clrMapOvr>
+    <a:masterClrMapping/>
+  </p:clrMapOvr>
+</p:notes>
+</file>
+
+<file path=ppt/notesSlides/notesSlide10.xml><?xml version="1.0" encoding="utf-8"?>
+<p:notes xmlns:a="http://schemas.openxmlformats.org/drawingml/2006/main" xmlns:p="http://schemas.openxmlformats.org/presentationml/2006/main" xmlns:r="http://schemas.openxmlformats.org/officeDocument/2006/relationships">
+  <p:cSld>
+    <p:spTree>
+      <p:nvGrpSpPr>
+        <p:cNvPr id="1" name=""/>
+        <p:cNvGrpSpPr/>
+        <p:nvPr/>
+      </p:nvGrpSpPr>
+      <p:grpSpPr>
+        <a:xfrm>
+          <a:off x="0" y="0"/>
+          <a:ext cx="0" cy="0"/>
+          <a:chOff x="0" y="0"/>
+          <a:chExt cx="0" cy="0"/>
+        </a:xfrm>
+      </p:grpSpPr>
+      <p:sp>
+        <p:nvSpPr>
+          <p:cNvPr id="2" name="Slide Image Placeholder 1"/>
+          <p:cNvSpPr>
+            <a:spLocks noGrp="1"/>
+          </p:cNvSpPr>
+          <p:nvPr>
+            <p:ph type="sldImg" idx="2"/>
+          </p:nvPr>
+        </p:nvSpPr>
+        <p:spPr/>
+      </p:sp>
+      <p:sp>
+        <p:nvSpPr>
+          <p:cNvPr id="3" name="Notes Placeholder 2"/>
+          <p:cNvSpPr>
+            <a:spLocks noGrp="1"/>
+          </p:cNvSpPr>
+          <p:nvPr>
+            <p:ph type="body" idx="3" sz="quarter"/>
+          </p:nvPr>
+        </p:nvSpPr>
+        <p:spPr/>
+        <p:txBody>
+          <a:bodyPr/>
+          <a:lstStyle/>
+          <a:p>
+            <a:r>
+              <a:t>Fiche Module — Module Réseaux Mostaganem</a:t>
+            </a:r>
+          </a:p>
+          <a:p>
+            <a:r>
+              <a:t>Dr. BELACEL Madani — Université de Mostaganem</a:t>
+            </a:r>
+          </a:p>
+          <a:p>
+            <a:r>
+              <a:t>Année 2026-2027</a:t>
+            </a:r>
+          </a:p>
+        </p:txBody>
+      </p:sp>
+      <p:sp>
+        <p:nvSpPr>
+          <p:cNvPr id="4" name="Slide Number Placeholder 3"/>
+          <p:cNvSpPr>
+            <a:spLocks noGrp="1"/>
+          </p:cNvSpPr>
+          <p:nvPr>
+            <p:ph type="sldNum" idx="5" sz="quarter"/>
+          </p:nvPr>
+        </p:nvSpPr>
+        <p:spPr/>
+      </p:sp>
+    </p:spTree>
+  </p:cSld>
+  <p:clrMapOvr>
+    <a:masterClrMapping/>
+  </p:clrMapOvr>
+</p:notes>
+</file>
+
+<file path=ppt/notesSlides/notesSlide2.xml><?xml version="1.0" encoding="utf-8"?>
+<p:notes xmlns:a="http://schemas.openxmlformats.org/drawingml/2006/main" xmlns:p="http://schemas.openxmlformats.org/presentationml/2006/main" xmlns:r="http://schemas.openxmlformats.org/officeDocument/2006/relationships">
+  <p:cSld>
+    <p:spTree>
+      <p:nvGrpSpPr>
+        <p:cNvPr id="1" name=""/>
+        <p:cNvGrpSpPr/>
+        <p:nvPr/>
+      </p:nvGrpSpPr>
+      <p:grpSpPr>
+        <a:xfrm>
+          <a:off x="0" y="0"/>
+          <a:ext cx="0" cy="0"/>
+          <a:chOff x="0" y="0"/>
+          <a:chExt cx="0" cy="0"/>
+        </a:xfrm>
+      </p:grpSpPr>
+      <p:sp>
+        <p:nvSpPr>
+          <p:cNvPr id="2" name="Slide Image Placeholder 1"/>
+          <p:cNvSpPr>
+            <a:spLocks noGrp="1"/>
+          </p:cNvSpPr>
+          <p:nvPr>
+            <p:ph type="sldImg" idx="2"/>
+          </p:nvPr>
+        </p:nvSpPr>
+        <p:spPr/>
+      </p:sp>
+      <p:sp>
+        <p:nvSpPr>
+          <p:cNvPr id="3" name="Notes Placeholder 2"/>
+          <p:cNvSpPr>
+            <a:spLocks noGrp="1"/>
+          </p:cNvSpPr>
+          <p:nvPr>
+            <p:ph type="body" idx="3" sz="quarter"/>
+          </p:nvPr>
+        </p:nvSpPr>
+        <p:spPr/>
+        <p:txBody>
+          <a:bodyPr/>
+          <a:lstStyle/>
+          <a:p>
+            <a:r>
+              <a:t>Fiche Module — Module Réseaux Mostaganem</a:t>
+            </a:r>
+          </a:p>
+          <a:p>
+            <a:r>
+              <a:t>Dr. BELACEL Madani — Université de Mostaganem</a:t>
+            </a:r>
+          </a:p>
+          <a:p>
+            <a:r>
+              <a:t>Année 2026-2027</a:t>
+            </a:r>
+          </a:p>
+        </p:txBody>
+      </p:sp>
+      <p:sp>
+        <p:nvSpPr>
+          <p:cNvPr id="4" name="Slide Number Placeholder 3"/>
+          <p:cNvSpPr>
+            <a:spLocks noGrp="1"/>
+          </p:cNvSpPr>
+          <p:nvPr>
+            <p:ph type="sldNum" idx="5" sz="quarter"/>
+          </p:nvPr>
+        </p:nvSpPr>
+        <p:spPr/>
+      </p:sp>
+    </p:spTree>
+  </p:cSld>
+  <p:clrMapOvr>
+    <a:masterClrMapping/>
+  </p:clrMapOvr>
+</p:notes>
+</file>
+
+<file path=ppt/notesSlides/notesSlide3.xml><?xml version="1.0" encoding="utf-8"?>
+<p:notes xmlns:a="http://schemas.openxmlformats.org/drawingml/2006/main" xmlns:p="http://schemas.openxmlformats.org/presentationml/2006/main" xmlns:r="http://schemas.openxmlformats.org/officeDocument/2006/relationships">
+  <p:cSld>
+    <p:spTree>
+      <p:nvGrpSpPr>
+        <p:cNvPr id="1" name=""/>
+        <p:cNvGrpSpPr/>
+        <p:nvPr/>
+      </p:nvGrpSpPr>
+      <p:grpSpPr>
+        <a:xfrm>
+          <a:off x="0" y="0"/>
+          <a:ext cx="0" cy="0"/>
+          <a:chOff x="0" y="0"/>
+          <a:chExt cx="0" cy="0"/>
+        </a:xfrm>
+      </p:grpSpPr>
+      <p:sp>
+        <p:nvSpPr>
+          <p:cNvPr id="2" name="Slide Image Placeholder 1"/>
+          <p:cNvSpPr>
+            <a:spLocks noGrp="1"/>
+          </p:cNvSpPr>
+          <p:nvPr>
+            <p:ph type="sldImg" idx="2"/>
+          </p:nvPr>
+        </p:nvSpPr>
+        <p:spPr/>
+      </p:sp>
+      <p:sp>
+        <p:nvSpPr>
+          <p:cNvPr id="3" name="Notes Placeholder 2"/>
+          <p:cNvSpPr>
+            <a:spLocks noGrp="1"/>
+          </p:cNvSpPr>
+          <p:nvPr>
+            <p:ph type="body" idx="3" sz="quarter"/>
+          </p:nvPr>
+        </p:nvSpPr>
+        <p:spPr/>
+        <p:txBody>
+          <a:bodyPr/>
+          <a:lstStyle/>
+          <a:p>
+            <a:r>
+              <a:t>Fiche Module — Module Réseaux Mostaganem</a:t>
+            </a:r>
+          </a:p>
+          <a:p>
+            <a:r>
+              <a:t>Dr. BELACEL Madani — Université de Mostaganem</a:t>
+            </a:r>
+          </a:p>
+          <a:p>
+            <a:r>
+              <a:t>Année 2026-2027</a:t>
+            </a:r>
+          </a:p>
+        </p:txBody>
+      </p:sp>
+      <p:sp>
+        <p:nvSpPr>
+          <p:cNvPr id="4" name="Slide Number Placeholder 3"/>
+          <p:cNvSpPr>
+            <a:spLocks noGrp="1"/>
+          </p:cNvSpPr>
+          <p:nvPr>
+            <p:ph type="sldNum" idx="5" sz="quarter"/>
+          </p:nvPr>
+        </p:nvSpPr>
+        <p:spPr/>
+      </p:sp>
+    </p:spTree>
+  </p:cSld>
+  <p:clrMapOvr>
+    <a:masterClrMapping/>
+  </p:clrMapOvr>
+</p:notes>
+</file>
+
+<file path=ppt/notesSlides/notesSlide4.xml><?xml version="1.0" encoding="utf-8"?>
+<p:notes xmlns:a="http://schemas.openxmlformats.org/drawingml/2006/main" xmlns:p="http://schemas.openxmlformats.org/presentationml/2006/main" xmlns:r="http://schemas.openxmlformats.org/officeDocument/2006/relationships">
+  <p:cSld>
+    <p:spTree>
+      <p:nvGrpSpPr>
+        <p:cNvPr id="1" name=""/>
+        <p:cNvGrpSpPr/>
+        <p:nvPr/>
+      </p:nvGrpSpPr>
+      <p:grpSpPr>
+        <a:xfrm>
+          <a:off x="0" y="0"/>
+          <a:ext cx="0" cy="0"/>
+          <a:chOff x="0" y="0"/>
+          <a:chExt cx="0" cy="0"/>
+        </a:xfrm>
+      </p:grpSpPr>
+      <p:sp>
+        <p:nvSpPr>
+          <p:cNvPr id="2" name="Slide Image Placeholder 1"/>
+          <p:cNvSpPr>
+            <a:spLocks noGrp="1"/>
+          </p:cNvSpPr>
+          <p:nvPr>
+            <p:ph type="sldImg" idx="2"/>
+          </p:nvPr>
+        </p:nvSpPr>
+        <p:spPr/>
+      </p:sp>
+      <p:sp>
+        <p:nvSpPr>
+          <p:cNvPr id="3" name="Notes Placeholder 2"/>
+          <p:cNvSpPr>
+            <a:spLocks noGrp="1"/>
+          </p:cNvSpPr>
+          <p:nvPr>
+            <p:ph type="body" idx="3" sz="quarter"/>
+          </p:nvPr>
+        </p:nvSpPr>
+        <p:spPr/>
+        <p:txBody>
+          <a:bodyPr/>
+          <a:lstStyle/>
+          <a:p>
+            <a:r>
+              <a:t>Fiche Module — Module Réseaux Mostaganem</a:t>
+            </a:r>
+          </a:p>
+          <a:p>
+            <a:r>
+              <a:t>Dr. BELACEL Madani — Université de Mostaganem</a:t>
+            </a:r>
+          </a:p>
+          <a:p>
+            <a:r>
+              <a:t>Année 2026-2027</a:t>
+            </a:r>
+          </a:p>
+        </p:txBody>
+      </p:sp>
+      <p:sp>
+        <p:nvSpPr>
+          <p:cNvPr id="4" name="Slide Number Placeholder 3"/>
+          <p:cNvSpPr>
+            <a:spLocks noGrp="1"/>
+          </p:cNvSpPr>
+          <p:nvPr>
+            <p:ph type="sldNum" idx="5" sz="quarter"/>
+          </p:nvPr>
+        </p:nvSpPr>
+        <p:spPr/>
+      </p:sp>
+    </p:spTree>
+  </p:cSld>
+  <p:clrMapOvr>
+    <a:masterClrMapping/>
+  </p:clrMapOvr>
+</p:notes>
+</file>
+
+<file path=ppt/notesSlides/notesSlide5.xml><?xml version="1.0" encoding="utf-8"?>
+<p:notes xmlns:a="http://schemas.openxmlformats.org/drawingml/2006/main" xmlns:p="http://schemas.openxmlformats.org/presentationml/2006/main" xmlns:r="http://schemas.openxmlformats.org/officeDocument/2006/relationships">
+  <p:cSld>
+    <p:spTree>
+      <p:nvGrpSpPr>
+        <p:cNvPr id="1" name=""/>
+        <p:cNvGrpSpPr/>
+        <p:nvPr/>
+      </p:nvGrpSpPr>
+      <p:grpSpPr>
+        <a:xfrm>
+          <a:off x="0" y="0"/>
+          <a:ext cx="0" cy="0"/>
+          <a:chOff x="0" y="0"/>
+          <a:chExt cx="0" cy="0"/>
+        </a:xfrm>
+      </p:grpSpPr>
+      <p:sp>
+        <p:nvSpPr>
+          <p:cNvPr id="2" name="Slide Image Placeholder 1"/>
+          <p:cNvSpPr>
+            <a:spLocks noGrp="1"/>
+          </p:cNvSpPr>
+          <p:nvPr>
+            <p:ph type="sldImg" idx="2"/>
+          </p:nvPr>
+        </p:nvSpPr>
+        <p:spPr/>
+      </p:sp>
+      <p:sp>
+        <p:nvSpPr>
+          <p:cNvPr id="3" name="Notes Placeholder 2"/>
+          <p:cNvSpPr>
+            <a:spLocks noGrp="1"/>
+          </p:cNvSpPr>
+          <p:nvPr>
+            <p:ph type="body" idx="3" sz="quarter"/>
+          </p:nvPr>
+        </p:nvSpPr>
+        <p:spPr/>
+        <p:txBody>
+          <a:bodyPr/>
+          <a:lstStyle/>
+          <a:p>
+            <a:r>
+              <a:t>Fiche Module — Module Réseaux Mostaganem</a:t>
+            </a:r>
+          </a:p>
+          <a:p>
+            <a:r>
+              <a:t>Dr. BELACEL Madani — Université de Mostaganem</a:t>
+            </a:r>
+          </a:p>
+          <a:p>
+            <a:r>
+              <a:t>Année 2026-2027</a:t>
+            </a:r>
+          </a:p>
+        </p:txBody>
+      </p:sp>
+      <p:sp>
+        <p:nvSpPr>
+          <p:cNvPr id="4" name="Slide Number Placeholder 3"/>
+          <p:cNvSpPr>
+            <a:spLocks noGrp="1"/>
+          </p:cNvSpPr>
+          <p:nvPr>
+            <p:ph type="sldNum" idx="5" sz="quarter"/>
+          </p:nvPr>
+        </p:nvSpPr>
+        <p:spPr/>
+      </p:sp>
+    </p:spTree>
+  </p:cSld>
+  <p:clrMapOvr>
+    <a:masterClrMapping/>
+  </p:clrMapOvr>
+</p:notes>
+</file>
+
+<file path=ppt/notesSlides/notesSlide6.xml><?xml version="1.0" encoding="utf-8"?>
+<p:notes xmlns:a="http://schemas.openxmlformats.org/drawingml/2006/main" xmlns:p="http://schemas.openxmlformats.org/presentationml/2006/main" xmlns:r="http://schemas.openxmlformats.org/officeDocument/2006/relationships">
+  <p:cSld>
+    <p:spTree>
+      <p:nvGrpSpPr>
+        <p:cNvPr id="1" name=""/>
+        <p:cNvGrpSpPr/>
+        <p:nvPr/>
+      </p:nvGrpSpPr>
+      <p:grpSpPr>
+        <a:xfrm>
+          <a:off x="0" y="0"/>
+          <a:ext cx="0" cy="0"/>
+          <a:chOff x="0" y="0"/>
+          <a:chExt cx="0" cy="0"/>
+        </a:xfrm>
+      </p:grpSpPr>
+      <p:sp>
+        <p:nvSpPr>
+          <p:cNvPr id="2" name="Slide Image Placeholder 1"/>
+          <p:cNvSpPr>
+            <a:spLocks noGrp="1"/>
+          </p:cNvSpPr>
+          <p:nvPr>
+            <p:ph type="sldImg" idx="2"/>
+          </p:nvPr>
+        </p:nvSpPr>
+        <p:spPr/>
+      </p:sp>
+      <p:sp>
+        <p:nvSpPr>
+          <p:cNvPr id="3" name="Notes Placeholder 2"/>
+          <p:cNvSpPr>
+            <a:spLocks noGrp="1"/>
+          </p:cNvSpPr>
+          <p:nvPr>
+            <p:ph type="body" idx="3" sz="quarter"/>
+          </p:nvPr>
+        </p:nvSpPr>
+        <p:spPr/>
+        <p:txBody>
+          <a:bodyPr/>
+          <a:lstStyle/>
+          <a:p>
+            <a:r>
+              <a:t>Fiche Module — Module Réseaux Mostaganem</a:t>
+            </a:r>
+          </a:p>
+          <a:p>
+            <a:r>
+              <a:t>Dr. BELACEL Madani — Université de Mostaganem</a:t>
+            </a:r>
+          </a:p>
+          <a:p>
+            <a:r>
+              <a:t>Année 2026-2027</a:t>
+            </a:r>
+          </a:p>
+        </p:txBody>
+      </p:sp>
+      <p:sp>
+        <p:nvSpPr>
+          <p:cNvPr id="4" name="Slide Number Placeholder 3"/>
+          <p:cNvSpPr>
+            <a:spLocks noGrp="1"/>
+          </p:cNvSpPr>
+          <p:nvPr>
+            <p:ph type="sldNum" idx="5" sz="quarter"/>
+          </p:nvPr>
+        </p:nvSpPr>
+        <p:spPr/>
+      </p:sp>
+    </p:spTree>
+  </p:cSld>
+  <p:clrMapOvr>
+    <a:masterClrMapping/>
+  </p:clrMapOvr>
+</p:notes>
+</file>
+
+<file path=ppt/notesSlides/notesSlide7.xml><?xml version="1.0" encoding="utf-8"?>
+<p:notes xmlns:a="http://schemas.openxmlformats.org/drawingml/2006/main" xmlns:p="http://schemas.openxmlformats.org/presentationml/2006/main" xmlns:r="http://schemas.openxmlformats.org/officeDocument/2006/relationships">
+  <p:cSld>
+    <p:spTree>
+      <p:nvGrpSpPr>
+        <p:cNvPr id="1" name=""/>
+        <p:cNvGrpSpPr/>
+        <p:nvPr/>
+      </p:nvGrpSpPr>
+      <p:grpSpPr>
+        <a:xfrm>
+          <a:off x="0" y="0"/>
+          <a:ext cx="0" cy="0"/>
+          <a:chOff x="0" y="0"/>
+          <a:chExt cx="0" cy="0"/>
+        </a:xfrm>
+      </p:grpSpPr>
+      <p:sp>
+        <p:nvSpPr>
+          <p:cNvPr id="2" name="Slide Image Placeholder 1"/>
+          <p:cNvSpPr>
+            <a:spLocks noGrp="1"/>
+          </p:cNvSpPr>
+          <p:nvPr>
+            <p:ph type="sldImg" idx="2"/>
+          </p:nvPr>
+        </p:nvSpPr>
+        <p:spPr/>
+      </p:sp>
+      <p:sp>
+        <p:nvSpPr>
+          <p:cNvPr id="3" name="Notes Placeholder 2"/>
+          <p:cNvSpPr>
+            <a:spLocks noGrp="1"/>
+          </p:cNvSpPr>
+          <p:nvPr>
+            <p:ph type="body" idx="3" sz="quarter"/>
+          </p:nvPr>
+        </p:nvSpPr>
+        <p:spPr/>
+        <p:txBody>
+          <a:bodyPr/>
+          <a:lstStyle/>
+          <a:p>
+            <a:r>
+              <a:t>Fiche Module — Module Réseaux Mostaganem</a:t>
+            </a:r>
+          </a:p>
+          <a:p>
+            <a:r>
+              <a:t>Dr. BELACEL Madani — Université de Mostaganem</a:t>
+            </a:r>
+          </a:p>
+          <a:p>
+            <a:r>
+              <a:t>Année 2026-2027</a:t>
+            </a:r>
+          </a:p>
+        </p:txBody>
+      </p:sp>
+      <p:sp>
+        <p:nvSpPr>
+          <p:cNvPr id="4" name="Slide Number Placeholder 3"/>
+          <p:cNvSpPr>
+            <a:spLocks noGrp="1"/>
+          </p:cNvSpPr>
+          <p:nvPr>
+            <p:ph type="sldNum" idx="5" sz="quarter"/>
+          </p:nvPr>
+        </p:nvSpPr>
+        <p:spPr/>
+      </p:sp>
+    </p:spTree>
+  </p:cSld>
+  <p:clrMapOvr>
+    <a:masterClrMapping/>
+  </p:clrMapOvr>
+</p:notes>
+</file>
+
+<file path=ppt/notesSlides/notesSlide8.xml><?xml version="1.0" encoding="utf-8"?>
+<p:notes xmlns:a="http://schemas.openxmlformats.org/drawingml/2006/main" xmlns:p="http://schemas.openxmlformats.org/presentationml/2006/main" xmlns:r="http://schemas.openxmlformats.org/officeDocument/2006/relationships">
+  <p:cSld>
+    <p:spTree>
+      <p:nvGrpSpPr>
+        <p:cNvPr id="1" name=""/>
+        <p:cNvGrpSpPr/>
+        <p:nvPr/>
+      </p:nvGrpSpPr>
+      <p:grpSpPr>
+        <a:xfrm>
+          <a:off x="0" y="0"/>
+          <a:ext cx="0" cy="0"/>
+          <a:chOff x="0" y="0"/>
+          <a:chExt cx="0" cy="0"/>
+        </a:xfrm>
+      </p:grpSpPr>
+      <p:sp>
+        <p:nvSpPr>
+          <p:cNvPr id="2" name="Slide Image Placeholder 1"/>
+          <p:cNvSpPr>
+            <a:spLocks noGrp="1"/>
+          </p:cNvSpPr>
+          <p:nvPr>
+            <p:ph type="sldImg" idx="2"/>
+          </p:nvPr>
+        </p:nvSpPr>
+        <p:spPr/>
+      </p:sp>
+      <p:sp>
+        <p:nvSpPr>
+          <p:cNvPr id="3" name="Notes Placeholder 2"/>
+          <p:cNvSpPr>
+            <a:spLocks noGrp="1"/>
+          </p:cNvSpPr>
+          <p:nvPr>
+            <p:ph type="body" idx="3" sz="quarter"/>
+          </p:nvPr>
+        </p:nvSpPr>
+        <p:spPr/>
+        <p:txBody>
+          <a:bodyPr/>
+          <a:lstStyle/>
+          <a:p>
+            <a:r>
+              <a:t>Fiche Module — Module Réseaux Mostaganem</a:t>
+            </a:r>
+          </a:p>
+          <a:p>
+            <a:r>
+              <a:t>Dr. BELACEL Madani — Université de Mostaganem</a:t>
+            </a:r>
+          </a:p>
+          <a:p>
+            <a:r>
+              <a:t>Année 2026-2027</a:t>
+            </a:r>
+          </a:p>
+        </p:txBody>
+      </p:sp>
+      <p:sp>
+        <p:nvSpPr>
+          <p:cNvPr id="4" name="Slide Number Placeholder 3"/>
+          <p:cNvSpPr>
+            <a:spLocks noGrp="1"/>
+          </p:cNvSpPr>
+          <p:nvPr>
+            <p:ph type="sldNum" idx="5" sz="quarter"/>
+          </p:nvPr>
+        </p:nvSpPr>
+        <p:spPr/>
+      </p:sp>
+    </p:spTree>
+  </p:cSld>
+  <p:clrMapOvr>
+    <a:masterClrMapping/>
+  </p:clrMapOvr>
+</p:notes>
+</file>
+
+<file path=ppt/notesSlides/notesSlide9.xml><?xml version="1.0" encoding="utf-8"?>
+<p:notes xmlns:a="http://schemas.openxmlformats.org/drawingml/2006/main" xmlns:p="http://schemas.openxmlformats.org/presentationml/2006/main" xmlns:r="http://schemas.openxmlformats.org/officeDocument/2006/relationships">
+  <p:cSld>
+    <p:spTree>
+      <p:nvGrpSpPr>
+        <p:cNvPr id="1" name=""/>
+        <p:cNvGrpSpPr/>
+        <p:nvPr/>
+      </p:nvGrpSpPr>
+      <p:grpSpPr>
+        <a:xfrm>
+          <a:off x="0" y="0"/>
+          <a:ext cx="0" cy="0"/>
+          <a:chOff x="0" y="0"/>
+          <a:chExt cx="0" cy="0"/>
+        </a:xfrm>
+      </p:grpSpPr>
+      <p:sp>
+        <p:nvSpPr>
+          <p:cNvPr id="2" name="Slide Image Placeholder 1"/>
+          <p:cNvSpPr>
+            <a:spLocks noGrp="1"/>
+          </p:cNvSpPr>
+          <p:nvPr>
+            <p:ph type="sldImg" idx="2"/>
+          </p:nvPr>
+        </p:nvSpPr>
+        <p:spPr/>
+      </p:sp>
+      <p:sp>
+        <p:nvSpPr>
+          <p:cNvPr id="3" name="Notes Placeholder 2"/>
+          <p:cNvSpPr>
+            <a:spLocks noGrp="1"/>
+          </p:cNvSpPr>
+          <p:nvPr>
+            <p:ph type="body" idx="3" sz="quarter"/>
+          </p:nvPr>
+        </p:nvSpPr>
+        <p:spPr/>
+        <p:txBody>
+          <a:bodyPr/>
+          <a:lstStyle/>
+          <a:p>
+            <a:r>
+              <a:t>Fiche Module — Module Réseaux Mostaganem</a:t>
+            </a:r>
+          </a:p>
+          <a:p>
+            <a:r>
+              <a:t>Dr. BELACEL Madani — Université de Mostaganem</a:t>
+            </a:r>
+          </a:p>
+          <a:p>
+            <a:r>
+              <a:t>Année 2026-2027</a:t>
+            </a:r>
+          </a:p>
+        </p:txBody>
+      </p:sp>
+      <p:sp>
+        <p:nvSpPr>
+          <p:cNvPr id="4" name="Slide Number Placeholder 3"/>
+          <p:cNvSpPr>
+            <a:spLocks noGrp="1"/>
+          </p:cNvSpPr>
+          <p:nvPr>
+            <p:ph type="sldNum" idx="5" sz="quarter"/>
+          </p:nvPr>
+        </p:nvSpPr>
+        <p:spPr/>
+      </p:sp>
+    </p:spTree>
+  </p:cSld>
+  <p:clrMapOvr>
+    <a:masterClrMapping/>
+  </p:clrMapOvr>
+</p:notes>
 </file>
 
 <file path=ppt/slideLayouts/slideLayout1.xml><?xml version="1.0" encoding="utf-8"?>

--- a/cours/Module_Réseau_Mostaganem/Série_Officielle/RSID-M1-S2/Fiche_Reseaux_RSID-M1-S2_00_Fiche-Module_FR.pptx
+++ b/cours/Module_Réseau_Mostaganem/Série_Officielle/RSID-M1-S2/Fiche_Reseaux_RSID-M1-S2_00_Fiche-Module_FR.pptx
@@ -3992,7 +3992,7 @@
           <a:solidFill>
             <a:schemeClr val="tx1"/>
           </a:solidFill>
-          <a:latin typeface="+mj-lt"/>
+          <a:latin typeface="Poppins"/>
           <a:ea typeface="+mj-ea"/>
           <a:cs typeface="+mj-cs"/>
         </a:defRPr>
@@ -4009,7 +4009,7 @@
           <a:solidFill>
             <a:schemeClr val="tx1"/>
           </a:solidFill>
-          <a:latin typeface="+mn-lt"/>
+          <a:latin typeface="Poppins"/>
           <a:ea typeface="+mn-ea"/>
           <a:cs typeface="+mn-cs"/>
         </a:defRPr>
@@ -4024,7 +4024,7 @@
           <a:solidFill>
             <a:schemeClr val="tx1"/>
           </a:solidFill>
-          <a:latin typeface="+mn-lt"/>
+          <a:latin typeface="Poppins"/>
           <a:ea typeface="+mn-ea"/>
           <a:cs typeface="+mn-cs"/>
         </a:defRPr>
@@ -4039,7 +4039,7 @@
           <a:solidFill>
             <a:schemeClr val="tx1"/>
           </a:solidFill>
-          <a:latin typeface="+mn-lt"/>
+          <a:latin typeface="Poppins"/>
           <a:ea typeface="+mn-ea"/>
           <a:cs typeface="+mn-cs"/>
         </a:defRPr>
@@ -4054,7 +4054,7 @@
           <a:solidFill>
             <a:schemeClr val="tx1"/>
           </a:solidFill>
-          <a:latin typeface="+mn-lt"/>
+          <a:latin typeface="Poppins"/>
           <a:ea typeface="+mn-ea"/>
           <a:cs typeface="+mn-cs"/>
         </a:defRPr>
@@ -4069,7 +4069,7 @@
           <a:solidFill>
             <a:schemeClr val="tx1"/>
           </a:solidFill>
-          <a:latin typeface="+mn-lt"/>
+          <a:latin typeface="Poppins"/>
           <a:ea typeface="+mn-ea"/>
           <a:cs typeface="+mn-cs"/>
         </a:defRPr>
@@ -4084,7 +4084,7 @@
           <a:solidFill>
             <a:schemeClr val="tx1"/>
           </a:solidFill>
-          <a:latin typeface="+mn-lt"/>
+          <a:latin typeface="Poppins"/>
           <a:ea typeface="+mn-ea"/>
           <a:cs typeface="+mn-cs"/>
         </a:defRPr>
@@ -4099,7 +4099,7 @@
           <a:solidFill>
             <a:schemeClr val="tx1"/>
           </a:solidFill>
-          <a:latin typeface="+mn-lt"/>
+          <a:latin typeface="Poppins"/>
           <a:ea typeface="+mn-ea"/>
           <a:cs typeface="+mn-cs"/>
         </a:defRPr>
@@ -4114,7 +4114,7 @@
           <a:solidFill>
             <a:schemeClr val="tx1"/>
           </a:solidFill>
-          <a:latin typeface="+mn-lt"/>
+          <a:latin typeface="Poppins"/>
           <a:ea typeface="+mn-ea"/>
           <a:cs typeface="+mn-cs"/>
         </a:defRPr>
@@ -4129,7 +4129,7 @@
           <a:solidFill>
             <a:schemeClr val="tx1"/>
           </a:solidFill>
-          <a:latin typeface="+mn-lt"/>
+          <a:latin typeface="Poppins"/>
           <a:ea typeface="+mn-ea"/>
           <a:cs typeface="+mn-cs"/>
         </a:defRPr>
@@ -4144,7 +4144,7 @@
           <a:solidFill>
             <a:schemeClr val="tx1"/>
           </a:solidFill>
-          <a:latin typeface="+mn-lt"/>
+          <a:latin typeface="Poppins"/>
           <a:ea typeface="+mn-ea"/>
           <a:cs typeface="+mn-cs"/>
         </a:defRPr>
@@ -4154,7 +4154,7 @@
           <a:solidFill>
             <a:schemeClr val="tx1"/>
           </a:solidFill>
-          <a:latin typeface="+mn-lt"/>
+          <a:latin typeface="Poppins"/>
           <a:ea typeface="+mn-ea"/>
           <a:cs typeface="+mn-cs"/>
         </a:defRPr>
@@ -4164,7 +4164,7 @@
           <a:solidFill>
             <a:schemeClr val="tx1"/>
           </a:solidFill>
-          <a:latin typeface="+mn-lt"/>
+          <a:latin typeface="Poppins"/>
           <a:ea typeface="+mn-ea"/>
           <a:cs typeface="+mn-cs"/>
         </a:defRPr>
@@ -4174,7 +4174,7 @@
           <a:solidFill>
             <a:schemeClr val="tx1"/>
           </a:solidFill>
-          <a:latin typeface="+mn-lt"/>
+          <a:latin typeface="Poppins"/>
           <a:ea typeface="+mn-ea"/>
           <a:cs typeface="+mn-cs"/>
         </a:defRPr>
@@ -4184,7 +4184,7 @@
           <a:solidFill>
             <a:schemeClr val="tx1"/>
           </a:solidFill>
-          <a:latin typeface="+mn-lt"/>
+          <a:latin typeface="Poppins"/>
           <a:ea typeface="+mn-ea"/>
           <a:cs typeface="+mn-cs"/>
         </a:defRPr>
@@ -4194,7 +4194,7 @@
           <a:solidFill>
             <a:schemeClr val="tx1"/>
           </a:solidFill>
-          <a:latin typeface="+mn-lt"/>
+          <a:latin typeface="Poppins"/>
           <a:ea typeface="+mn-ea"/>
           <a:cs typeface="+mn-cs"/>
         </a:defRPr>
@@ -4204,7 +4204,7 @@
           <a:solidFill>
             <a:schemeClr val="tx1"/>
           </a:solidFill>
-          <a:latin typeface="+mn-lt"/>
+          <a:latin typeface="Poppins"/>
           <a:ea typeface="+mn-ea"/>
           <a:cs typeface="+mn-cs"/>
         </a:defRPr>
@@ -4214,7 +4214,7 @@
           <a:solidFill>
             <a:schemeClr val="tx1"/>
           </a:solidFill>
-          <a:latin typeface="+mn-lt"/>
+          <a:latin typeface="Poppins"/>
           <a:ea typeface="+mn-ea"/>
           <a:cs typeface="+mn-cs"/>
         </a:defRPr>
@@ -4224,7 +4224,7 @@
           <a:solidFill>
             <a:schemeClr val="tx1"/>
           </a:solidFill>
-          <a:latin typeface="+mn-lt"/>
+          <a:latin typeface="Poppins"/>
           <a:ea typeface="+mn-ea"/>
           <a:cs typeface="+mn-cs"/>
         </a:defRPr>
@@ -4310,13 +4310,52 @@
           <a:p>
             <a:pPr algn="ctr">
               <a:defRPr sz="900">
-                <a:solidFill>
-                  <a:srgbClr val="404040"/>
-                </a:solidFill>
+                <a:solidFill>val="45586A"/&gt;</a:solidFill>
               </a:defRPr>
             </a:pPr>
             <a:r>
               <a:t>Cours Réseaux RSID-M1-S2  •  Diapositive 1/10</a:t>
+            </a:r>
+          </a:p>
+        </p:txBody>
+      </p:sp>
+      <p:sp>
+        <p:nvSpPr>
+          <p:cNvPr id="990001" name="Pied de page FLE"/>
+          <p:cNvSpPr>
+            <a:spLocks noGrp="1"/>
+          </p:cNvSpPr>
+          <p:nvPr/>
+        </p:nvSpPr>
+        <p:spPr>
+          <a:xfrm>
+            <a:off x="3611880" y="-137160"/>
+            <a:ext cx="4572000" cy="274320"/>
+          </a:xfrm>
+          <a:prstGeom prst="rect">
+            <a:avLst/>
+          </a:prstGeom>
+        </p:spPr>
+        <p:txBody>
+          <a:bodyPr anchor="b"/>
+          <a:lstStyle/>
+          <a:p>
+            <a:pPr algn="r">
+              <a:defRPr sz="900">
+                <a:solidFill>
+                  <a:srgbClr val="9AA7B6"/>
+                </a:solidFill>
+                <a:latin typeface="Poppins"/>
+              </a:defRPr>
+            </a:pPr>
+            <a:r>
+              <a:rPr lang="fr-FR" sz="900">
+                <a:solidFill>
+                  <a:srgbClr val="9AA7B6"/>
+                </a:solidFill>
+                <a:latin typeface="Poppins"/>
+              </a:rPr>
+              <a:t>Université de Mostaganem — Dr. Madani BELACEL</a:t>
             </a:r>
           </a:p>
         </p:txBody>
@@ -4427,13 +4466,52 @@
           <a:p>
             <a:pPr algn="ctr">
               <a:defRPr sz="900">
-                <a:solidFill>
-                  <a:srgbClr val="404040"/>
-                </a:solidFill>
+                <a:solidFill>val="45586A"/&gt;</a:solidFill>
               </a:defRPr>
             </a:pPr>
             <a:r>
               <a:t>Cours Réseaux RSID-M1-S2  •  Diapositive 10/10</a:t>
+            </a:r>
+          </a:p>
+        </p:txBody>
+      </p:sp>
+      <p:sp>
+        <p:nvSpPr>
+          <p:cNvPr id="990001" name="Pied de page FLE"/>
+          <p:cNvSpPr>
+            <a:spLocks noGrp="1"/>
+          </p:cNvSpPr>
+          <p:nvPr/>
+        </p:nvSpPr>
+        <p:spPr>
+          <a:xfrm>
+            <a:off x="3611880" y="-137160"/>
+            <a:ext cx="4572000" cy="274320"/>
+          </a:xfrm>
+          <a:prstGeom prst="rect">
+            <a:avLst/>
+          </a:prstGeom>
+        </p:spPr>
+        <p:txBody>
+          <a:bodyPr anchor="b"/>
+          <a:lstStyle/>
+          <a:p>
+            <a:pPr algn="r">
+              <a:defRPr sz="900">
+                <a:solidFill>
+                  <a:srgbClr val="9AA7B6"/>
+                </a:solidFill>
+                <a:latin typeface="Poppins"/>
+              </a:defRPr>
+            </a:pPr>
+            <a:r>
+              <a:rPr lang="fr-FR" sz="900">
+                <a:solidFill>
+                  <a:srgbClr val="9AA7B6"/>
+                </a:solidFill>
+                <a:latin typeface="Poppins"/>
+              </a:rPr>
+              <a:t>Université de Mostaganem — Dr. Madani BELACEL</a:t>
             </a:r>
           </a:p>
         </p:txBody>
@@ -4544,13 +4622,52 @@
           <a:p>
             <a:pPr algn="ctr">
               <a:defRPr sz="900">
-                <a:solidFill>
-                  <a:srgbClr val="404040"/>
-                </a:solidFill>
+                <a:solidFill>val="45586A"/&gt;</a:solidFill>
               </a:defRPr>
             </a:pPr>
             <a:r>
               <a:t>Cours Réseaux RSID-M1-S2  •  Diapositive 2/10</a:t>
+            </a:r>
+          </a:p>
+        </p:txBody>
+      </p:sp>
+      <p:sp>
+        <p:nvSpPr>
+          <p:cNvPr id="990001" name="Pied de page FLE"/>
+          <p:cNvSpPr>
+            <a:spLocks noGrp="1"/>
+          </p:cNvSpPr>
+          <p:nvPr/>
+        </p:nvSpPr>
+        <p:spPr>
+          <a:xfrm>
+            <a:off x="3611880" y="-137160"/>
+            <a:ext cx="4572000" cy="274320"/>
+          </a:xfrm>
+          <a:prstGeom prst="rect">
+            <a:avLst/>
+          </a:prstGeom>
+        </p:spPr>
+        <p:txBody>
+          <a:bodyPr anchor="b"/>
+          <a:lstStyle/>
+          <a:p>
+            <a:pPr algn="r">
+              <a:defRPr sz="900">
+                <a:solidFill>
+                  <a:srgbClr val="9AA7B6"/>
+                </a:solidFill>
+                <a:latin typeface="Poppins"/>
+              </a:defRPr>
+            </a:pPr>
+            <a:r>
+              <a:rPr lang="fr-FR" sz="900">
+                <a:solidFill>
+                  <a:srgbClr val="9AA7B6"/>
+                </a:solidFill>
+                <a:latin typeface="Poppins"/>
+              </a:rPr>
+              <a:t>Université de Mostaganem — Dr. Madani BELACEL</a:t>
             </a:r>
           </a:p>
         </p:txBody>
@@ -4661,13 +4778,52 @@
           <a:p>
             <a:pPr algn="ctr">
               <a:defRPr sz="900">
-                <a:solidFill>
-                  <a:srgbClr val="404040"/>
-                </a:solidFill>
+                <a:solidFill>val="45586A"/&gt;</a:solidFill>
               </a:defRPr>
             </a:pPr>
             <a:r>
               <a:t>Cours Réseaux RSID-M1-S2  •  Diapositive 3/10</a:t>
+            </a:r>
+          </a:p>
+        </p:txBody>
+      </p:sp>
+      <p:sp>
+        <p:nvSpPr>
+          <p:cNvPr id="990001" name="Pied de page FLE"/>
+          <p:cNvSpPr>
+            <a:spLocks noGrp="1"/>
+          </p:cNvSpPr>
+          <p:nvPr/>
+        </p:nvSpPr>
+        <p:spPr>
+          <a:xfrm>
+            <a:off x="3611880" y="-137160"/>
+            <a:ext cx="4572000" cy="274320"/>
+          </a:xfrm>
+          <a:prstGeom prst="rect">
+            <a:avLst/>
+          </a:prstGeom>
+        </p:spPr>
+        <p:txBody>
+          <a:bodyPr anchor="b"/>
+          <a:lstStyle/>
+          <a:p>
+            <a:pPr algn="r">
+              <a:defRPr sz="900">
+                <a:solidFill>
+                  <a:srgbClr val="9AA7B6"/>
+                </a:solidFill>
+                <a:latin typeface="Poppins"/>
+              </a:defRPr>
+            </a:pPr>
+            <a:r>
+              <a:rPr lang="fr-FR" sz="900">
+                <a:solidFill>
+                  <a:srgbClr val="9AA7B6"/>
+                </a:solidFill>
+                <a:latin typeface="Poppins"/>
+              </a:rPr>
+              <a:t>Université de Mostaganem — Dr. Madani BELACEL</a:t>
             </a:r>
           </a:p>
         </p:txBody>
@@ -4778,13 +4934,52 @@
           <a:p>
             <a:pPr algn="ctr">
               <a:defRPr sz="900">
-                <a:solidFill>
-                  <a:srgbClr val="404040"/>
-                </a:solidFill>
+                <a:solidFill>val="45586A"/&gt;</a:solidFill>
               </a:defRPr>
             </a:pPr>
             <a:r>
               <a:t>Cours Réseaux RSID-M1-S2  •  Diapositive 4/10</a:t>
+            </a:r>
+          </a:p>
+        </p:txBody>
+      </p:sp>
+      <p:sp>
+        <p:nvSpPr>
+          <p:cNvPr id="990001" name="Pied de page FLE"/>
+          <p:cNvSpPr>
+            <a:spLocks noGrp="1"/>
+          </p:cNvSpPr>
+          <p:nvPr/>
+        </p:nvSpPr>
+        <p:spPr>
+          <a:xfrm>
+            <a:off x="3611880" y="-137160"/>
+            <a:ext cx="4572000" cy="274320"/>
+          </a:xfrm>
+          <a:prstGeom prst="rect">
+            <a:avLst/>
+          </a:prstGeom>
+        </p:spPr>
+        <p:txBody>
+          <a:bodyPr anchor="b"/>
+          <a:lstStyle/>
+          <a:p>
+            <a:pPr algn="r">
+              <a:defRPr sz="900">
+                <a:solidFill>
+                  <a:srgbClr val="9AA7B6"/>
+                </a:solidFill>
+                <a:latin typeface="Poppins"/>
+              </a:defRPr>
+            </a:pPr>
+            <a:r>
+              <a:rPr lang="fr-FR" sz="900">
+                <a:solidFill>
+                  <a:srgbClr val="9AA7B6"/>
+                </a:solidFill>
+                <a:latin typeface="Poppins"/>
+              </a:rPr>
+              <a:t>Université de Mostaganem — Dr. Madani BELACEL</a:t>
             </a:r>
           </a:p>
         </p:txBody>
@@ -4879,13 +5074,52 @@
           <a:p>
             <a:pPr algn="ctr">
               <a:defRPr sz="900">
-                <a:solidFill>
-                  <a:srgbClr val="404040"/>
-                </a:solidFill>
+                <a:solidFill>val="45586A"/&gt;</a:solidFill>
               </a:defRPr>
             </a:pPr>
             <a:r>
               <a:t>Cours Réseaux RSID-M1-S2  •  Diapositive 5/10</a:t>
+            </a:r>
+          </a:p>
+        </p:txBody>
+      </p:sp>
+      <p:sp>
+        <p:nvSpPr>
+          <p:cNvPr id="990001" name="Pied de page FLE"/>
+          <p:cNvSpPr>
+            <a:spLocks noGrp="1"/>
+          </p:cNvSpPr>
+          <p:nvPr/>
+        </p:nvSpPr>
+        <p:spPr>
+          <a:xfrm>
+            <a:off x="3611880" y="-137160"/>
+            <a:ext cx="4572000" cy="274320"/>
+          </a:xfrm>
+          <a:prstGeom prst="rect">
+            <a:avLst/>
+          </a:prstGeom>
+        </p:spPr>
+        <p:txBody>
+          <a:bodyPr anchor="b"/>
+          <a:lstStyle/>
+          <a:p>
+            <a:pPr algn="r">
+              <a:defRPr sz="900">
+                <a:solidFill>
+                  <a:srgbClr val="9AA7B6"/>
+                </a:solidFill>
+                <a:latin typeface="Poppins"/>
+              </a:defRPr>
+            </a:pPr>
+            <a:r>
+              <a:rPr lang="fr-FR" sz="900">
+                <a:solidFill>
+                  <a:srgbClr val="9AA7B6"/>
+                </a:solidFill>
+                <a:latin typeface="Poppins"/>
+              </a:rPr>
+              <a:t>Université de Mostaganem — Dr. Madani BELACEL</a:t>
             </a:r>
           </a:p>
         </p:txBody>
@@ -5004,13 +5238,52 @@
           <a:p>
             <a:pPr algn="ctr">
               <a:defRPr sz="900">
-                <a:solidFill>
-                  <a:srgbClr val="404040"/>
-                </a:solidFill>
+                <a:solidFill>val="45586A"/&gt;</a:solidFill>
               </a:defRPr>
             </a:pPr>
             <a:r>
               <a:t>Cours Réseaux RSID-M1-S2  •  Diapositive 6/10</a:t>
+            </a:r>
+          </a:p>
+        </p:txBody>
+      </p:sp>
+      <p:sp>
+        <p:nvSpPr>
+          <p:cNvPr id="990001" name="Pied de page FLE"/>
+          <p:cNvSpPr>
+            <a:spLocks noGrp="1"/>
+          </p:cNvSpPr>
+          <p:nvPr/>
+        </p:nvSpPr>
+        <p:spPr>
+          <a:xfrm>
+            <a:off x="3611880" y="-137160"/>
+            <a:ext cx="4572000" cy="274320"/>
+          </a:xfrm>
+          <a:prstGeom prst="rect">
+            <a:avLst/>
+          </a:prstGeom>
+        </p:spPr>
+        <p:txBody>
+          <a:bodyPr anchor="b"/>
+          <a:lstStyle/>
+          <a:p>
+            <a:pPr algn="r">
+              <a:defRPr sz="900">
+                <a:solidFill>
+                  <a:srgbClr val="9AA7B6"/>
+                </a:solidFill>
+                <a:latin typeface="Poppins"/>
+              </a:defRPr>
+            </a:pPr>
+            <a:r>
+              <a:rPr lang="fr-FR" sz="900">
+                <a:solidFill>
+                  <a:srgbClr val="9AA7B6"/>
+                </a:solidFill>
+                <a:latin typeface="Poppins"/>
+              </a:rPr>
+              <a:t>Université de Mostaganem — Dr. Madani BELACEL</a:t>
             </a:r>
           </a:p>
         </p:txBody>
@@ -5105,13 +5378,52 @@
           <a:p>
             <a:pPr algn="ctr">
               <a:defRPr sz="900">
-                <a:solidFill>
-                  <a:srgbClr val="404040"/>
-                </a:solidFill>
+                <a:solidFill>val="45586A"/&gt;</a:solidFill>
               </a:defRPr>
             </a:pPr>
             <a:r>
               <a:t>Cours Réseaux RSID-M1-S2  •  Diapositive 7/10</a:t>
+            </a:r>
+          </a:p>
+        </p:txBody>
+      </p:sp>
+      <p:sp>
+        <p:nvSpPr>
+          <p:cNvPr id="990001" name="Pied de page FLE"/>
+          <p:cNvSpPr>
+            <a:spLocks noGrp="1"/>
+          </p:cNvSpPr>
+          <p:nvPr/>
+        </p:nvSpPr>
+        <p:spPr>
+          <a:xfrm>
+            <a:off x="3611880" y="-137160"/>
+            <a:ext cx="4572000" cy="274320"/>
+          </a:xfrm>
+          <a:prstGeom prst="rect">
+            <a:avLst/>
+          </a:prstGeom>
+        </p:spPr>
+        <p:txBody>
+          <a:bodyPr anchor="b"/>
+          <a:lstStyle/>
+          <a:p>
+            <a:pPr algn="r">
+              <a:defRPr sz="900">
+                <a:solidFill>
+                  <a:srgbClr val="9AA7B6"/>
+                </a:solidFill>
+                <a:latin typeface="Poppins"/>
+              </a:defRPr>
+            </a:pPr>
+            <a:r>
+              <a:rPr lang="fr-FR" sz="900">
+                <a:solidFill>
+                  <a:srgbClr val="9AA7B6"/>
+                </a:solidFill>
+                <a:latin typeface="Poppins"/>
+              </a:rPr>
+              <a:t>Université de Mostaganem — Dr. Madani BELACEL</a:t>
             </a:r>
           </a:p>
         </p:txBody>
@@ -5230,13 +5542,52 @@
           <a:p>
             <a:pPr algn="ctr">
               <a:defRPr sz="900">
-                <a:solidFill>
-                  <a:srgbClr val="404040"/>
-                </a:solidFill>
+                <a:solidFill>val="45586A"/&gt;</a:solidFill>
               </a:defRPr>
             </a:pPr>
             <a:r>
               <a:t>Cours Réseaux RSID-M1-S2  •  Diapositive 8/10</a:t>
+            </a:r>
+          </a:p>
+        </p:txBody>
+      </p:sp>
+      <p:sp>
+        <p:nvSpPr>
+          <p:cNvPr id="990001" name="Pied de page FLE"/>
+          <p:cNvSpPr>
+            <a:spLocks noGrp="1"/>
+          </p:cNvSpPr>
+          <p:nvPr/>
+        </p:nvSpPr>
+        <p:spPr>
+          <a:xfrm>
+            <a:off x="3611880" y="-137160"/>
+            <a:ext cx="4572000" cy="274320"/>
+          </a:xfrm>
+          <a:prstGeom prst="rect">
+            <a:avLst/>
+          </a:prstGeom>
+        </p:spPr>
+        <p:txBody>
+          <a:bodyPr anchor="b"/>
+          <a:lstStyle/>
+          <a:p>
+            <a:pPr algn="r">
+              <a:defRPr sz="900">
+                <a:solidFill>
+                  <a:srgbClr val="9AA7B6"/>
+                </a:solidFill>
+                <a:latin typeface="Poppins"/>
+              </a:defRPr>
+            </a:pPr>
+            <a:r>
+              <a:rPr lang="fr-FR" sz="900">
+                <a:solidFill>
+                  <a:srgbClr val="9AA7B6"/>
+                </a:solidFill>
+                <a:latin typeface="Poppins"/>
+              </a:rPr>
+              <a:t>Université de Mostaganem — Dr. Madani BELACEL</a:t>
             </a:r>
           </a:p>
         </p:txBody>
@@ -5347,13 +5698,52 @@
           <a:p>
             <a:pPr algn="ctr">
               <a:defRPr sz="900">
-                <a:solidFill>
-                  <a:srgbClr val="404040"/>
-                </a:solidFill>
+                <a:solidFill>val="45586A"/&gt;</a:solidFill>
               </a:defRPr>
             </a:pPr>
             <a:r>
               <a:t>Cours Réseaux RSID-M1-S2  •  Diapositive 9/10</a:t>
+            </a:r>
+          </a:p>
+        </p:txBody>
+      </p:sp>
+      <p:sp>
+        <p:nvSpPr>
+          <p:cNvPr id="990001" name="Pied de page FLE"/>
+          <p:cNvSpPr>
+            <a:spLocks noGrp="1"/>
+          </p:cNvSpPr>
+          <p:nvPr/>
+        </p:nvSpPr>
+        <p:spPr>
+          <a:xfrm>
+            <a:off x="3611880" y="-137160"/>
+            <a:ext cx="4572000" cy="274320"/>
+          </a:xfrm>
+          <a:prstGeom prst="rect">
+            <a:avLst/>
+          </a:prstGeom>
+        </p:spPr>
+        <p:txBody>
+          <a:bodyPr anchor="b"/>
+          <a:lstStyle/>
+          <a:p>
+            <a:pPr algn="r">
+              <a:defRPr sz="900">
+                <a:solidFill>
+                  <a:srgbClr val="9AA7B6"/>
+                </a:solidFill>
+                <a:latin typeface="Poppins"/>
+              </a:defRPr>
+            </a:pPr>
+            <a:r>
+              <a:rPr lang="fr-FR" sz="900">
+                <a:solidFill>
+                  <a:srgbClr val="9AA7B6"/>
+                </a:solidFill>
+                <a:latin typeface="Poppins"/>
+              </a:rPr>
+              <a:t>Université de Mostaganem — Dr. Madani BELACEL</a:t>
             </a:r>
           </a:p>
         </p:txBody>
@@ -5412,7 +5802,7 @@
     </a:clrScheme>
     <a:fontScheme name="Office">
       <a:majorFont>
-        <a:latin typeface="Calibri"/>
+        <a:latin typeface="Poppins"/>
         <a:ea typeface=""/>
         <a:cs typeface=""/>
         <a:font script="Jpan" typeface="ＭＳ Ｐゴシック"/>
@@ -5447,7 +5837,7 @@
         <a:font script="Geor" typeface="Sylfaen"/>
       </a:majorFont>
       <a:minorFont>
-        <a:latin typeface="Calibri"/>
+        <a:latin typeface="Poppins"/>
         <a:ea typeface=""/>
         <a:cs typeface=""/>
         <a:font script="Jpan" typeface="ＭＳ Ｐゴシック"/>
